--- a/class_3/deep_learning_course_class_3.pptx
+++ b/class_3/deep_learning_course_class_3.pptx
@@ -1483,7 +1483,42 @@
               <a:buNone/>
             </a:pPr>
             <a:r>
-              <a:t/>
+              <a:rPr lang="en"/>
+              <a:t>Why is this non-trivial?</a:t>
+            </a:r>
+            <a:endParaRPr/>
+          </a:p>
+          <a:p>
+            <a:pPr indent="-298450" lvl="0" marL="457200" rtl="0" algn="l">
+              <a:spcBef>
+                <a:spcPts val="0"/>
+              </a:spcBef>
+              <a:spcAft>
+                <a:spcPts val="0"/>
+              </a:spcAft>
+              <a:buSzPts val="1100"/>
+              <a:buChar char="-"/>
+            </a:pPr>
+            <a:r>
+              <a:rPr lang="en"/>
+              <a:t>Non-linear classification boundaries</a:t>
+            </a:r>
+            <a:endParaRPr/>
+          </a:p>
+          <a:p>
+            <a:pPr indent="-298450" lvl="0" marL="457200" rtl="0" algn="l">
+              <a:spcBef>
+                <a:spcPts val="0"/>
+              </a:spcBef>
+              <a:spcAft>
+                <a:spcPts val="0"/>
+              </a:spcAft>
+              <a:buSzPts val="1100"/>
+              <a:buChar char="-"/>
+            </a:pPr>
+            <a:r>
+              <a:rPr lang="en"/>
+              <a:t>A linear system can never solve this problem with a high degree of accuracy!</a:t>
             </a:r>
             <a:endParaRPr/>
           </a:p>
@@ -9083,7 +9118,7 @@
         </p:spPr>
         <p:txBody>
           <a:bodyPr anchorCtr="0" anchor="t" bIns="91425" lIns="91425" spcFirstLastPara="1" rIns="91425" wrap="square" tIns="91425">
-            <a:normAutofit/>
+            <a:normAutofit lnSpcReduction="10000"/>
           </a:bodyPr>
           <a:lstStyle/>
           <a:p>
@@ -9143,6 +9178,26 @@
             <a:r>
               <a:rPr lang="en" sz="1260"/>
               <a:t>The dimension of our input data is now 2, rather than 1 </a:t>
+            </a:r>
+            <a:endParaRPr sz="1260"/>
+          </a:p>
+          <a:p>
+            <a:pPr indent="-308610" lvl="0" marL="457200" rtl="0" algn="l">
+              <a:lnSpc>
+                <a:spcPct val="95000"/>
+              </a:lnSpc>
+              <a:spcBef>
+                <a:spcPts val="0"/>
+              </a:spcBef>
+              <a:spcAft>
+                <a:spcPts val="0"/>
+              </a:spcAft>
+              <a:buSzPts val="1260"/>
+              <a:buChar char="-"/>
+            </a:pPr>
+            <a:r>
+              <a:rPr lang="en" sz="1260"/>
+              <a:t>Network output is a vector rather than scalar</a:t>
             </a:r>
             <a:endParaRPr sz="1260"/>
           </a:p>
@@ -10701,7 +10756,7 @@
         <p:spPr>
           <a:xfrm>
             <a:off x="408425" y="940925"/>
-            <a:ext cx="7926900" cy="1326900"/>
+            <a:ext cx="7926900" cy="2795100"/>
           </a:xfrm>
           <a:prstGeom prst="rect">
             <a:avLst/>
@@ -10754,6 +10809,118 @@
               </a:rPr>
               <a:t> to the notes as needed</a:t>
             </a:r>
+            <a:br>
+              <a:rPr lang="en" sz="1060">
+                <a:solidFill>
+                  <a:schemeClr val="dk2"/>
+                </a:solidFill>
+              </a:rPr>
+            </a:br>
+            <a:endParaRPr sz="1060">
+              <a:solidFill>
+                <a:schemeClr val="dk2"/>
+              </a:solidFill>
+            </a:endParaRPr>
+          </a:p>
+          <a:p>
+            <a:pPr indent="-295910" lvl="0" marL="457200" rtl="0" algn="l">
+              <a:spcBef>
+                <a:spcPts val="0"/>
+              </a:spcBef>
+              <a:spcAft>
+                <a:spcPts val="0"/>
+              </a:spcAft>
+              <a:buClr>
+                <a:schemeClr val="dk2"/>
+              </a:buClr>
+              <a:buSzPts val="1060"/>
+              <a:buChar char="-"/>
+            </a:pPr>
+            <a:r>
+              <a:rPr lang="en" sz="1060">
+                <a:solidFill>
+                  <a:schemeClr val="dk2"/>
+                </a:solidFill>
+              </a:rPr>
+              <a:t>Why can’t we use the logits directly in x-entropy loss? Why do we take the exponential of each logit? Hint: Can probabilities be negative? What about logits?</a:t>
+            </a:r>
+            <a:br>
+              <a:rPr lang="en" sz="1060">
+                <a:solidFill>
+                  <a:schemeClr val="dk2"/>
+                </a:solidFill>
+              </a:rPr>
+            </a:br>
+            <a:endParaRPr sz="1060">
+              <a:solidFill>
+                <a:schemeClr val="dk2"/>
+              </a:solidFill>
+            </a:endParaRPr>
+          </a:p>
+          <a:p>
+            <a:pPr indent="-295910" lvl="0" marL="457200" rtl="0" algn="l">
+              <a:spcBef>
+                <a:spcPts val="0"/>
+              </a:spcBef>
+              <a:spcAft>
+                <a:spcPts val="0"/>
+              </a:spcAft>
+              <a:buClr>
+                <a:schemeClr val="dk2"/>
+              </a:buClr>
+              <a:buSzPts val="1060"/>
+              <a:buChar char="-"/>
+            </a:pPr>
+            <a:r>
+              <a:rPr lang="en" sz="1060">
+                <a:solidFill>
+                  <a:schemeClr val="dk2"/>
+                </a:solidFill>
+              </a:rPr>
+              <a:t>Run the spiral data classification code (class3/simple_nn2.py) with default values.. You can turn on the draw_movie_frame feature to capture the classification boundaries as the optimization proceeds and the network learns. </a:t>
+            </a:r>
+            <a:br>
+              <a:rPr lang="en" sz="1060">
+                <a:solidFill>
+                  <a:schemeClr val="dk2"/>
+                </a:solidFill>
+              </a:rPr>
+            </a:br>
+            <a:endParaRPr sz="1060">
+              <a:solidFill>
+                <a:schemeClr val="dk2"/>
+              </a:solidFill>
+            </a:endParaRPr>
+          </a:p>
+          <a:p>
+            <a:pPr indent="-295910" lvl="0" marL="457200" rtl="0" algn="l">
+              <a:spcBef>
+                <a:spcPts val="0"/>
+              </a:spcBef>
+              <a:spcAft>
+                <a:spcPts val="0"/>
+              </a:spcAft>
+              <a:buClr>
+                <a:schemeClr val="dk2"/>
+              </a:buClr>
+              <a:buSzPts val="1060"/>
+              <a:buChar char="-"/>
+            </a:pPr>
+            <a:r>
+              <a:rPr lang="en" sz="1060">
+                <a:solidFill>
+                  <a:schemeClr val="dk2"/>
+                </a:solidFill>
+              </a:rPr>
+              <a:t>Run the spiral data classification code without the ReLU non-linearities.. What do you observe?</a:t>
+            </a:r>
+            <a:br>
+              <a:rPr lang="en" sz="1060">
+                <a:solidFill>
+                  <a:schemeClr val="dk2"/>
+                </a:solidFill>
+              </a:rPr>
+            </a:br>
             <a:endParaRPr sz="1060">
               <a:solidFill>
                 <a:schemeClr val="dk2"/>
@@ -11026,7 +11193,7 @@
             </a:pPr>
             <a:r>
               <a:rPr lang="en"/>
-              <a:t>Monitoring and tracking </a:t>
+              <a:t>Monitoring and tracking experiments</a:t>
             </a:r>
             <a:endParaRPr/>
           </a:p>
@@ -11060,7 +11227,7 @@
             </a:pPr>
             <a:r>
               <a:rPr lang="en"/>
-              <a:t>Using a Neural Network to classify points on a spiral dataset</a:t>
+              <a:t>Building a Neural Network to classify points on a spiral dataset</a:t>
             </a:r>
             <a:endParaRPr/>
           </a:p>
@@ -11232,7 +11399,7 @@
             <a:tbl>
               <a:tblPr>
                 <a:noFill/>
-                <a:tableStyleId>{C9DF7355-8558-4E87-817F-2BF3C81853DC}</a:tableStyleId>
+                <a:tableStyleId>{890C13F4-2B98-4E3F-9E77-6AEF00A6A4DA}</a:tableStyleId>
               </a:tblPr>
               <a:tblGrid>
                 <a:gridCol w="1107400"/>
@@ -12116,7 +12283,7 @@
             <a:tbl>
               <a:tblPr>
                 <a:noFill/>
-                <a:tableStyleId>{AA9F0271-74B5-4243-9341-785EF61831BC}</a:tableStyleId>
+                <a:tableStyleId>{3B23DB74-1729-4800-BA70-C8E4DCD532E5}</a:tableStyleId>
               </a:tblPr>
               <a:tblGrid>
                 <a:gridCol w="19050"/>
@@ -12164,7 +12331,7 @@
             <a:tbl>
               <a:tblPr>
                 <a:noFill/>
-                <a:tableStyleId>{AA9F0271-74B5-4243-9341-785EF61831BC}</a:tableStyleId>
+                <a:tableStyleId>{3B23DB74-1729-4800-BA70-C8E4DCD532E5}</a:tableStyleId>
               </a:tblPr>
               <a:tblGrid>
                 <a:gridCol w="4482150"/>
@@ -13845,7 +14012,7 @@
             <a:tbl>
               <a:tblPr>
                 <a:noFill/>
-                <a:tableStyleId>{C9DF7355-8558-4E87-817F-2BF3C81853DC}</a:tableStyleId>
+                <a:tableStyleId>{890C13F4-2B98-4E3F-9E77-6AEF00A6A4DA}</a:tableStyleId>
               </a:tblPr>
               <a:tblGrid>
                 <a:gridCol w="2782400"/>
